--- a/Reporte 260826.pptx
+++ b/Reporte 260826.pptx
@@ -5,7 +5,7 @@
     <p:sldMasterId id="2147483672" r:id="rId1"/>
   </p:sldMasterIdLst>
   <p:notesMasterIdLst>
-    <p:notesMasterId r:id="rId20"/>
+    <p:notesMasterId r:id="rId21"/>
   </p:notesMasterIdLst>
   <p:sldIdLst>
     <p:sldId id="350" r:id="rId2"/>
@@ -25,22 +25,23 @@
     <p:sldId id="412" r:id="rId16"/>
     <p:sldId id="371" r:id="rId17"/>
     <p:sldId id="413" r:id="rId18"/>
-    <p:sldId id="280" r:id="rId19"/>
+    <p:sldId id="416" r:id="rId19"/>
+    <p:sldId id="280" r:id="rId20"/>
   </p:sldIdLst>
   <p:sldSz cx="9144000" cy="5143500" type="screen16x9"/>
   <p:notesSz cx="6858000" cy="9144000"/>
   <p:embeddedFontLst>
     <p:embeddedFont>
       <p:font typeface="Montserrat" panose="00000500000000000000" pitchFamily="2" charset="0"/>
-      <p:regular r:id="rId21"/>
-      <p:bold r:id="rId22"/>
-      <p:italic r:id="rId23"/>
-      <p:boldItalic r:id="rId24"/>
+      <p:regular r:id="rId22"/>
+      <p:bold r:id="rId23"/>
+      <p:italic r:id="rId24"/>
+      <p:boldItalic r:id="rId25"/>
     </p:embeddedFont>
     <p:embeddedFont>
       <p:font typeface="Montserrat Black" panose="00000A00000000000000" pitchFamily="2" charset="0"/>
-      <p:bold r:id="rId25"/>
-      <p:boldItalic r:id="rId26"/>
+      <p:bold r:id="rId26"/>
+      <p:boldItalic r:id="rId27"/>
     </p:embeddedFont>
   </p:embeddedFontLst>
   <p:defaultTextStyle>
@@ -6959,10 +6960,10 @@
       </p:sp>
       <p:pic>
         <p:nvPicPr>
-          <p:cNvPr id="4" name="Imagen 3">
+          <p:cNvPr id="5" name="Imagen 4">
             <a:extLst>
               <a:ext uri="{FF2B5EF4-FFF2-40B4-BE49-F238E27FC236}">
-                <a16:creationId xmlns:a16="http://schemas.microsoft.com/office/drawing/2014/main" id="{1A031D92-2011-E264-A471-CAD410959D8F}"/>
+                <a16:creationId xmlns:a16="http://schemas.microsoft.com/office/drawing/2014/main" id="{D55193C9-5F19-044E-1BD9-3FC8F4815747}"/>
               </a:ext>
             </a:extLst>
           </p:cNvPr>
@@ -6979,8 +6980,8 @@
         </p:blipFill>
         <p:spPr>
           <a:xfrm>
-            <a:off x="0" y="944510"/>
-            <a:ext cx="9144000" cy="3397355"/>
+            <a:off x="0" y="795158"/>
+            <a:ext cx="9144000" cy="3553184"/>
           </a:xfrm>
           <a:prstGeom prst="rect">
             <a:avLst/>
@@ -7065,10 +7066,10 @@
       </p:sp>
       <p:pic>
         <p:nvPicPr>
-          <p:cNvPr id="3" name="Imagen 2">
+          <p:cNvPr id="4" name="Imagen 3">
             <a:extLst>
               <a:ext uri="{FF2B5EF4-FFF2-40B4-BE49-F238E27FC236}">
-                <a16:creationId xmlns:a16="http://schemas.microsoft.com/office/drawing/2014/main" id="{7B06B157-8230-64EA-F852-D7C2A5860CE8}"/>
+                <a16:creationId xmlns:a16="http://schemas.microsoft.com/office/drawing/2014/main" id="{4E41A316-0E32-A3C4-7A52-DA6BE9511AA6}"/>
               </a:ext>
             </a:extLst>
           </p:cNvPr>
@@ -7085,8 +7086,8 @@
         </p:blipFill>
         <p:spPr>
           <a:xfrm>
-            <a:off x="0" y="1327121"/>
-            <a:ext cx="9144000" cy="2632133"/>
+            <a:off x="0" y="1334720"/>
+            <a:ext cx="9144000" cy="2616935"/>
           </a:xfrm>
           <a:prstGeom prst="rect">
             <a:avLst/>
@@ -7171,10 +7172,10 @@
       </p:sp>
       <p:pic>
         <p:nvPicPr>
-          <p:cNvPr id="5" name="Imagen 4">
+          <p:cNvPr id="4" name="Imagen 3">
             <a:extLst>
               <a:ext uri="{FF2B5EF4-FFF2-40B4-BE49-F238E27FC236}">
-                <a16:creationId xmlns:a16="http://schemas.microsoft.com/office/drawing/2014/main" id="{96D1BFD4-FAF1-34EF-F14D-80B1EC00F8A2}"/>
+                <a16:creationId xmlns:a16="http://schemas.microsoft.com/office/drawing/2014/main" id="{64549E9E-7E2C-7572-2EF1-F9AA79FB5582}"/>
               </a:ext>
             </a:extLst>
           </p:cNvPr>
@@ -7191,8 +7192,8 @@
         </p:blipFill>
         <p:spPr>
           <a:xfrm>
-            <a:off x="0" y="698082"/>
-            <a:ext cx="9144000" cy="3890211"/>
+            <a:off x="0" y="768830"/>
+            <a:ext cx="9144000" cy="3748715"/>
           </a:xfrm>
           <a:prstGeom prst="rect">
             <a:avLst/>
@@ -7277,10 +7278,10 @@
       </p:sp>
       <p:pic>
         <p:nvPicPr>
-          <p:cNvPr id="3" name="Imagen 2">
+          <p:cNvPr id="4" name="Imagen 3">
             <a:extLst>
               <a:ext uri="{FF2B5EF4-FFF2-40B4-BE49-F238E27FC236}">
-                <a16:creationId xmlns:a16="http://schemas.microsoft.com/office/drawing/2014/main" id="{F567C1CC-EF3F-AAA4-D733-D71CB3BF13D4}"/>
+                <a16:creationId xmlns:a16="http://schemas.microsoft.com/office/drawing/2014/main" id="{1F04F55A-A4A6-C115-23C4-C768F7E2AEFC}"/>
               </a:ext>
             </a:extLst>
           </p:cNvPr>
@@ -7297,8 +7298,8 @@
         </p:blipFill>
         <p:spPr>
           <a:xfrm>
-            <a:off x="0" y="1251048"/>
-            <a:ext cx="9144000" cy="2784280"/>
+            <a:off x="0" y="1275884"/>
+            <a:ext cx="9144000" cy="2734607"/>
           </a:xfrm>
           <a:prstGeom prst="rect">
             <a:avLst/>
@@ -7383,10 +7384,10 @@
       </p:sp>
       <p:pic>
         <p:nvPicPr>
-          <p:cNvPr id="3" name="Imagen 2">
+          <p:cNvPr id="4" name="Imagen 3">
             <a:extLst>
               <a:ext uri="{FF2B5EF4-FFF2-40B4-BE49-F238E27FC236}">
-                <a16:creationId xmlns:a16="http://schemas.microsoft.com/office/drawing/2014/main" id="{586F5479-7467-5803-4022-144D60B0A4A4}"/>
+                <a16:creationId xmlns:a16="http://schemas.microsoft.com/office/drawing/2014/main" id="{ED5B1473-E361-77F2-9051-DA9F66692294}"/>
               </a:ext>
             </a:extLst>
           </p:cNvPr>
@@ -7403,8 +7404,8 @@
         </p:blipFill>
         <p:spPr>
           <a:xfrm>
-            <a:off x="0" y="1592966"/>
-            <a:ext cx="9144000" cy="2100444"/>
+            <a:off x="0" y="617773"/>
+            <a:ext cx="9144000" cy="3907953"/>
           </a:xfrm>
           <a:prstGeom prst="rect">
             <a:avLst/>
@@ -7495,10 +7496,10 @@
       </p:sp>
       <p:pic>
         <p:nvPicPr>
-          <p:cNvPr id="4" name="Imagen 3">
+          <p:cNvPr id="3" name="Imagen 2">
             <a:extLst>
               <a:ext uri="{FF2B5EF4-FFF2-40B4-BE49-F238E27FC236}">
-                <a16:creationId xmlns:a16="http://schemas.microsoft.com/office/drawing/2014/main" id="{5288315B-74C6-3057-B733-E7DE1A6CDB13}"/>
+                <a16:creationId xmlns:a16="http://schemas.microsoft.com/office/drawing/2014/main" id="{84672662-FB0F-0527-E44A-2ABD8ACEAE49}"/>
               </a:ext>
             </a:extLst>
           </p:cNvPr>
@@ -7515,8 +7516,8 @@
         </p:blipFill>
         <p:spPr>
           <a:xfrm>
-            <a:off x="1969339" y="395912"/>
-            <a:ext cx="5132298" cy="4619717"/>
+            <a:off x="0" y="1452141"/>
+            <a:ext cx="9144000" cy="2382093"/>
           </a:xfrm>
           <a:prstGeom prst="rect">
             <a:avLst/>
@@ -7537,6 +7538,118 @@
 </file>
 
 <file path=ppt/slides/slide18.xml><?xml version="1.0" encoding="utf-8"?>
+<p:sld xmlns:a="http://schemas.openxmlformats.org/drawingml/2006/main" xmlns:r="http://schemas.openxmlformats.org/officeDocument/2006/relationships" xmlns:p="http://schemas.openxmlformats.org/presentationml/2006/main">
+  <p:cSld>
+    <p:bg>
+      <p:bgPr>
+        <a:solidFill>
+          <a:srgbClr val="F8F9FA"/>
+        </a:solidFill>
+        <a:effectLst/>
+      </p:bgPr>
+    </p:bg>
+    <p:spTree>
+      <p:nvGrpSpPr>
+        <p:cNvPr id="1" name="">
+          <a:extLst>
+            <a:ext uri="{FF2B5EF4-FFF2-40B4-BE49-F238E27FC236}">
+              <a16:creationId xmlns:a16="http://schemas.microsoft.com/office/drawing/2014/main" id="{87966D19-114C-A6F3-AD60-EA7522CD0637}"/>
+            </a:ext>
+          </a:extLst>
+        </p:cNvPr>
+        <p:cNvGrpSpPr/>
+        <p:nvPr/>
+      </p:nvGrpSpPr>
+      <p:grpSpPr>
+        <a:xfrm>
+          <a:off x="0" y="0"/>
+          <a:ext cx="0" cy="0"/>
+          <a:chOff x="0" y="0"/>
+          <a:chExt cx="0" cy="0"/>
+        </a:xfrm>
+      </p:grpSpPr>
+      <p:sp>
+        <p:nvSpPr>
+          <p:cNvPr id="5" name="CuadroTexto 4">
+            <a:extLst>
+              <a:ext uri="{FF2B5EF4-FFF2-40B4-BE49-F238E27FC236}">
+                <a16:creationId xmlns:a16="http://schemas.microsoft.com/office/drawing/2014/main" id="{8C2D92B3-FE6E-B338-3B95-6C582961E1DF}"/>
+              </a:ext>
+            </a:extLst>
+          </p:cNvPr>
+          <p:cNvSpPr txBox="1"/>
+          <p:nvPr/>
+        </p:nvSpPr>
+        <p:spPr>
+          <a:xfrm>
+            <a:off x="1926166" y="88135"/>
+            <a:ext cx="5291667" cy="307777"/>
+          </a:xfrm>
+          <a:prstGeom prst="rect">
+            <a:avLst/>
+          </a:prstGeom>
+          <a:noFill/>
+        </p:spPr>
+        <p:txBody>
+          <a:bodyPr wrap="square" rtlCol="0">
+            <a:spAutoFit/>
+          </a:bodyPr>
+          <a:lstStyle/>
+          <a:p>
+            <a:pPr algn="ctr"/>
+            <a:r>
+              <a:rPr lang="es-MX" b="1" dirty="0">
+                <a:latin typeface="Montserrat" pitchFamily="2" charset="0"/>
+              </a:rPr>
+              <a:t>Opinión emitida por radioescuchas</a:t>
+            </a:r>
+          </a:p>
+        </p:txBody>
+      </p:sp>
+      <p:pic>
+        <p:nvPicPr>
+          <p:cNvPr id="4" name="Imagen 3">
+            <a:extLst>
+              <a:ext uri="{FF2B5EF4-FFF2-40B4-BE49-F238E27FC236}">
+                <a16:creationId xmlns:a16="http://schemas.microsoft.com/office/drawing/2014/main" id="{69CCBEEF-24C0-1866-E429-331486407D7D}"/>
+              </a:ext>
+            </a:extLst>
+          </p:cNvPr>
+          <p:cNvPicPr>
+            <a:picLocks noChangeAspect="1"/>
+          </p:cNvPicPr>
+          <p:nvPr/>
+        </p:nvPicPr>
+        <p:blipFill>
+          <a:blip r:embed="rId2"/>
+          <a:stretch>
+            <a:fillRect/>
+          </a:stretch>
+        </p:blipFill>
+        <p:spPr>
+          <a:xfrm>
+            <a:off x="753535" y="1166607"/>
+            <a:ext cx="7563906" cy="2953162"/>
+          </a:xfrm>
+          <a:prstGeom prst="rect">
+            <a:avLst/>
+          </a:prstGeom>
+        </p:spPr>
+      </p:pic>
+    </p:spTree>
+    <p:extLst>
+      <p:ext uri="{BB962C8B-B14F-4D97-AF65-F5344CB8AC3E}">
+        <p14:creationId xmlns:p14="http://schemas.microsoft.com/office/powerpoint/2010/main" val="1931692817"/>
+      </p:ext>
+    </p:extLst>
+  </p:cSld>
+  <p:clrMapOvr>
+    <a:masterClrMapping/>
+  </p:clrMapOvr>
+</p:sld>
+</file>
+
+<file path=ppt/slides/slide19.xml><?xml version="1.0" encoding="utf-8"?>
 <p:sld xmlns:a="http://schemas.openxmlformats.org/drawingml/2006/main" xmlns:r="http://schemas.openxmlformats.org/officeDocument/2006/relationships" xmlns:p="http://schemas.openxmlformats.org/presentationml/2006/main">
   <p:cSld>
     <p:spTree>
